--- a/assets/pptx/catalog-287.pptx
+++ b/assets/pptx/catalog-287.pptx
@@ -3393,7 +3393,7 @@
                 <a:ea typeface="Ebrima"/>
                 <a:cs typeface="Ebrima"/>
               </a:rPr>
-              <a:t>ምን እላለሁ ምሥጋና አበዛለሁ (2x)</a:t>
+              <a:t>ምን እላለሁ ምሥጋና አበዛለሁ 2x</a:t>
             </a:r>
           </a:p>
         </p:txBody>
@@ -3707,7 +3707,7 @@
                 <a:ea typeface="Ebrima"/>
                 <a:cs typeface="Ebrima"/>
               </a:rPr>
-              <a:t>የመስቀሉ ስራ አያልቅም ቢነገር (4x)</a:t>
+              <a:t>የመስቀሉ ስራ አያልቅም ቢነገር 4x</a:t>
             </a:r>
           </a:p>
           <a:p>
@@ -3725,7 +3725,7 @@
                 <a:ea typeface="Ebrima"/>
                 <a:cs typeface="Ebrima"/>
               </a:rPr>
-              <a:t>የኢየሱስ ስራ አያልቅም ቢነገር (2x)</a:t>
+              <a:t>የኢየሱስ ስራ አያልቅም ቢነገር 2x</a:t>
             </a:r>
           </a:p>
         </p:txBody>
@@ -3931,7 +3931,7 @@
                 <a:ea typeface="Ebrima"/>
                 <a:cs typeface="Ebrima"/>
               </a:rPr>
-              <a:t>ምን እላለሁ ምሥጋና አበዛለሁ (2x)</a:t>
+              <a:t>ምን እላለሁ ምሥጋና አበዛለሁ 2x</a:t>
             </a:r>
           </a:p>
         </p:txBody>
@@ -4052,7 +4052,7 @@
                 <a:ea typeface="Ebrima"/>
                 <a:cs typeface="Ebrima"/>
               </a:rPr>
-              <a:t>ተመስገን ተመስገን ተመስገን እላለሁ (2x)</a:t>
+              <a:t>ተመስገን ተመስገን ተመስገን እላለሁ 2x</a:t>
             </a:r>
           </a:p>
         </p:txBody>
@@ -4137,7 +4137,7 @@
                 <a:ea typeface="Ebrima"/>
                 <a:cs typeface="Ebrima"/>
               </a:rPr>
-              <a:t>ምን እላለሁ ምሥጋና አበዛለሁ (2x)</a:t>
+              <a:t>ምን እላለሁ ምሥጋና አበዛለሁ 2x</a:t>
             </a:r>
           </a:p>
         </p:txBody>
@@ -4451,7 +4451,7 @@
                 <a:ea typeface="Ebrima"/>
                 <a:cs typeface="Ebrima"/>
               </a:rPr>
-              <a:t>ከሞት የመትረፌ አያልቅም ቢነገር (4x)</a:t>
+              <a:t>ከሞት የመትረፌ አያልቅም ቢነገር 4x</a:t>
             </a:r>
           </a:p>
         </p:txBody>
@@ -4657,7 +4657,7 @@
                 <a:ea typeface="Ebrima"/>
                 <a:cs typeface="Ebrima"/>
               </a:rPr>
-              <a:t>ምን እላለሁ ምሥጋና አበዛለሁ (2x)</a:t>
+              <a:t>ምን እላለሁ ምሥጋና አበዛለሁ 2x</a:t>
             </a:r>
           </a:p>
         </p:txBody>
@@ -4971,7 +4971,7 @@
                 <a:ea typeface="Ebrima"/>
                 <a:cs typeface="Ebrima"/>
               </a:rPr>
-              <a:t>ምህረትና ፍቅር እሰከ ዘለዓለም ነው (4x)</a:t>
+              <a:t>ምህረትና ፍቅር እሰከ ዘለዓለም ነው 4x</a:t>
             </a:r>
           </a:p>
         </p:txBody>
